--- a/8주차/한국어/게임엔진기초_8주차_오프라인_실습슬라이드.pptx
+++ b/8주차/한국어/게임엔진기초_8주차_오프라인_실습슬라이드.pptx
@@ -139,12 +139,12 @@
   <p:extLst>
     <p:ext uri="{521415D9-36F7-43E2-AB2F-B90AF26B5E84}">
       <p14:sectionLst xmlns:p14="http://schemas.microsoft.com/office/powerpoint/2010/main">
-        <p14:section name="시작" id="{0dab31df-954a-7b81-29fb-df77e558ada6}">
+        <p14:section name="시작" id="{9e659fc1-4d37-d7de-3676-21d0e909e074}">
           <p14:sldIdLst>
             <p14:sldId id="256"/>
           </p14:sldIdLst>
         </p14:section>
-        <p14:section name="실습 1" id="{118a22a8-6120-cd45-a2e5-49fdbb1d72ab}">
+        <p14:section name="실습 1" id="{dac80262-25f5-8152-2eff-8c1ecde1987f}">
           <p14:sldIdLst>
             <p14:sldId id="257"/>
             <p14:sldId id="258"/>
@@ -154,28 +154,28 @@
             <p14:sldId id="262"/>
           </p14:sldIdLst>
         </p14:section>
-        <p14:section name="실습 2" id="{8695fd80-b5ca-cf18-ba83-3885a8e99235}">
+        <p14:section name="실습 2" id="{2756eacd-561e-fbda-51a0-6bffff0b2d20}">
           <p14:sldIdLst>
             <p14:sldId id="263"/>
             <p14:sldId id="264"/>
             <p14:sldId id="265"/>
           </p14:sldIdLst>
         </p14:section>
-        <p14:section name="실습 3" id="{960df49a-79da-ce1d-abf8-2d37032b4d41}">
+        <p14:section name="실습 3" id="{95a38964-f941-c4a6-eb90-cab3d3faab27}">
           <p14:sldIdLst>
             <p14:sldId id="266"/>
             <p14:sldId id="267"/>
             <p14:sldId id="268"/>
           </p14:sldIdLst>
         </p14:section>
-        <p14:section name="실습 4" id="{c3e5ee45-611d-ad15-d1b6-6489403e4fb1}">
+        <p14:section name="실습 4" id="{9a2dacad-3f7f-7eff-6d2a-2b18e2ffc017}">
           <p14:sldIdLst>
             <p14:sldId id="269"/>
             <p14:sldId id="270"/>
             <p14:sldId id="271"/>
           </p14:sldIdLst>
         </p14:section>
-        <p14:section name="실습 5" id="{4ec3599c-6474-484f-7171-d8b634305eab}">
+        <p14:section name="실습 5" id="{6f1e49b8-c5c4-4f4e-9ea7-baee3ef80c2c}">
           <p14:sldIdLst>
             <p14:sldId id="272"/>
             <p14:sldId id="273"/>
@@ -184,13 +184,13 @@
             <p14:sldId id="276"/>
           </p14:sldIdLst>
         </p14:section>
-        <p14:section name="실습 6" id="{7d8534ba-8401-9c24-0afc-90520adb0dd4}">
+        <p14:section name="실습 6" id="{788300ba-a1b6-6702-77db-0b05ac0e2a99}">
           <p14:sldIdLst>
             <p14:sldId id="277"/>
             <p14:sldId id="278"/>
           </p14:sldIdLst>
         </p14:section>
-        <p14:section name="실습 7" id="{d04e55b2-bbe7-1a3c-83a6-29061ed7e649}">
+        <p14:section name="실습 7" id="{bc0a8bcb-decf-2934-f0d4-65f3e7af6cff}">
           <p14:sldIdLst>
             <p14:sldId id="279"/>
             <p14:sldId id="280"/>
@@ -202,7 +202,7 @@
             <p14:sldId id="286"/>
           </p14:sldIdLst>
         </p14:section>
-        <p14:section name="마무리" id="{7cf0b170-e6b9-a840-0600-a5e0aeec9854}">
+        <p14:section name="마무리" id="{b5aee252-6461-ff02-6502-822cf8f3c8ae}">
           <p14:sldIdLst>
             <p14:sldId id="287"/>
             <p14:sldId id="288"/>
@@ -4800,8 +4800,8 @@
         </p:nvSpPr>
         <p:spPr>
           <a:xfrm>
-            <a:off x="731520" y="1920240"/>
-            <a:ext cx="7498080" cy="822960"/>
+            <a:off x="731520" y="1783080"/>
+            <a:ext cx="7498080" cy="731520"/>
           </a:xfrm>
           <a:prstGeom prst="rect">
             <a:avLst/>
@@ -4820,7 +4820,7 @@
               <a:buNone/>
             </a:pPr>
             <a:r>
-              <a:rPr lang="en-US" sz="4000" b="1" dirty="0">
+              <a:rPr lang="en-US" sz="3600" b="1" dirty="0">
                 <a:solidFill>
                   <a:srgbClr val="FFFFFF"/>
                 </a:solidFill>
@@ -4828,9 +4828,9 @@
                 <a:ea typeface="Noto Sans KR" pitchFamily="34" charset="-122"/>
                 <a:cs typeface="Noto Sans KR" pitchFamily="34" charset="-120"/>
               </a:rPr>
-              <a:t>기말 프로젝트 시작</a:t>
-            </a:r>
-            <a:endParaRPr lang="en-US" sz="4000" dirty="0"/>
+              <a:t>오늘부터 시작.</a:t>
+            </a:r>
+            <a:endParaRPr lang="en-US" sz="3600" dirty="0"/>
           </a:p>
         </p:txBody>
       </p:sp>
@@ -4842,8 +4842,8 @@
         </p:nvSpPr>
         <p:spPr>
           <a:xfrm>
-            <a:off x="731520" y="2697480"/>
-            <a:ext cx="7498080" cy="822960"/>
+            <a:off x="731520" y="2514600"/>
+            <a:ext cx="7315200" cy="1188720"/>
           </a:xfrm>
           <a:prstGeom prst="rect">
             <a:avLst/>
@@ -4857,12 +4857,12 @@
           <a:p>
             <a:pPr algn="l" indent="0" marL="0">
               <a:lnSpc>
-                <a:spcPct val="115000"/>
-              </a:lnSpc>
-              <a:buNone/>
-            </a:pPr>
-            <a:r>
-              <a:rPr lang="en-US" sz="4000" b="1" dirty="0">
+                <a:spcPct val="105000"/>
+              </a:lnSpc>
+              <a:buNone/>
+            </a:pPr>
+            <a:r>
+              <a:rPr lang="en-US" sz="3000" b="1" dirty="0">
                 <a:solidFill>
                   <a:srgbClr val="E07A2E"/>
                 </a:solidFill>
@@ -4870,9 +4870,29 @@
                 <a:ea typeface="Noto Sans KR" pitchFamily="34" charset="-122"/>
                 <a:cs typeface="Noto Sans KR" pitchFamily="34" charset="-120"/>
               </a:rPr>
-              <a:t>AI와 기획 · 키 비주얼 · 에셋</a:t>
-            </a:r>
-            <a:endParaRPr lang="en-US" sz="4000" dirty="0"/>
+              <a:t>AI와 에셋으로 한 달간</a:t>
+            </a:r>
+            <a:endParaRPr lang="en-US" sz="3000" dirty="0"/>
+          </a:p>
+          <a:p>
+            <a:pPr algn="l" indent="0" marL="0">
+              <a:lnSpc>
+                <a:spcPct val="105000"/>
+              </a:lnSpc>
+              <a:buNone/>
+            </a:pPr>
+            <a:r>
+              <a:rPr lang="en-US" sz="3000" b="1" dirty="0">
+                <a:solidFill>
+                  <a:srgbClr val="E07A2E"/>
+                </a:solidFill>
+                <a:latin typeface="Noto Sans KR" pitchFamily="34" charset="0"/>
+                <a:ea typeface="Noto Sans KR" pitchFamily="34" charset="-122"/>
+                <a:cs typeface="Noto Sans KR" pitchFamily="34" charset="-120"/>
+              </a:rPr>
+              <a:t>만들어 보는 게임 프로젝트</a:t>
+            </a:r>
+            <a:endParaRPr lang="en-US" sz="3000" dirty="0"/>
           </a:p>
         </p:txBody>
       </p:sp>
@@ -4884,7 +4904,7 @@
         </p:nvSpPr>
         <p:spPr>
           <a:xfrm>
-            <a:off x="731520" y="3657600"/>
+            <a:off x="731520" y="3931920"/>
             <a:ext cx="7132320" cy="731520"/>
           </a:xfrm>
           <a:prstGeom prst="rect">
@@ -4904,7 +4924,7 @@
               <a:buNone/>
             </a:pPr>
             <a:r>
-              <a:rPr lang="en-US" sz="1700" dirty="0">
+              <a:rPr lang="en-US" sz="1600" dirty="0">
                 <a:solidFill>
                   <a:srgbClr val="D5DBE2"/>
                 </a:solidFill>
@@ -4914,7 +4934,7 @@
               </a:rPr>
               <a:t>AI와 함께 기획하고 키 비주얼을 만든 뒤, 새 프로젝트에서 에셋을 입힌 플레이어를 움직입니다</a:t>
             </a:r>
-            <a:endParaRPr lang="en-US" sz="1700" dirty="0"/>
+            <a:endParaRPr lang="en-US" sz="1600" dirty="0"/>
           </a:p>
         </p:txBody>
       </p:sp>

--- a/8주차/한국어/게임엔진기초_8주차_오프라인_실습슬라이드.pptx
+++ b/8주차/한국어/게임엔진기초_8주차_오프라인_실습슬라이드.pptx
@@ -145,13 +145,13 @@
   <p:extLst>
     <p:ext uri="{521415D9-36F7-43E2-AB2F-B90AF26B5E84}">
       <p14:sectionLst xmlns:p14="http://schemas.microsoft.com/office/powerpoint/2010/main">
-        <p14:section name="시작" id="{7470c2de-fc16-eacd-f59f-1ffd0760ff28}">
+        <p14:section name="시작" id="{8980bf71-045d-065a-d067-781377513439}">
           <p14:sldIdLst>
             <p14:sldId id="256"/>
             <p14:sldId id="257"/>
           </p14:sldIdLst>
         </p14:section>
-        <p14:section name="실습 1" id="{dc4b781d-c05a-daed-4252-364465115bd6}">
+        <p14:section name="실습 1" id="{7d849dee-8d42-b8b8-7726-47a3d8d4b966}">
           <p14:sldIdLst>
             <p14:sldId id="258"/>
             <p14:sldId id="259"/>
@@ -166,28 +166,28 @@
             <p14:sldId id="268"/>
           </p14:sldIdLst>
         </p14:section>
-        <p14:section name="실습 2" id="{989459e3-6dae-ec5d-83d1-60beb88d4b4b}">
+        <p14:section name="실습 2" id="{c568a43c-8f9e-759d-d6fb-60bc9dc12dab}">
           <p14:sldIdLst>
             <p14:sldId id="269"/>
             <p14:sldId id="270"/>
             <p14:sldId id="271"/>
           </p14:sldIdLst>
         </p14:section>
-        <p14:section name="실습 3" id="{e68df394-6b71-a9a2-7ca8-cb9a3d399b85}">
+        <p14:section name="실습 3" id="{60940096-8b76-4c20-6b12-f61fab6a9f0b}">
           <p14:sldIdLst>
             <p14:sldId id="272"/>
             <p14:sldId id="273"/>
             <p14:sldId id="274"/>
           </p14:sldIdLst>
         </p14:section>
-        <p14:section name="실습 4" id="{9705d748-fc29-29d9-dd9d-d5a2767dd137}">
+        <p14:section name="실습 4" id="{67d75e73-04dc-4dfe-79ca-1b6d7c439cb4}">
           <p14:sldIdLst>
             <p14:sldId id="275"/>
             <p14:sldId id="276"/>
             <p14:sldId id="277"/>
           </p14:sldIdLst>
         </p14:section>
-        <p14:section name="실습 5" id="{a3dd83ba-75df-10ca-b58d-afa0a5f0d651}">
+        <p14:section name="실습 5" id="{460dbe0d-a2ae-a84a-a99f-fce3a31523ec}">
           <p14:sldIdLst>
             <p14:sldId id="278"/>
             <p14:sldId id="279"/>
@@ -196,13 +196,13 @@
             <p14:sldId id="282"/>
           </p14:sldIdLst>
         </p14:section>
-        <p14:section name="실습 6" id="{77b061a0-d329-2a3b-479c-072ed4a67bdc}">
+        <p14:section name="실습 6" id="{bd8a8f7c-6cb6-78aa-a772-1a2a9bff8279}">
           <p14:sldIdLst>
             <p14:sldId id="283"/>
             <p14:sldId id="284"/>
           </p14:sldIdLst>
         </p14:section>
-        <p14:section name="실습 7" id="{a0747c99-743c-609f-f70e-24fce00c216d}">
+        <p14:section name="실습 7" id="{ae879727-f295-6c34-98d6-c495b7b4f81b}">
           <p14:sldIdLst>
             <p14:sldId id="285"/>
             <p14:sldId id="286"/>
@@ -214,7 +214,7 @@
             <p14:sldId id="292"/>
           </p14:sldIdLst>
         </p14:section>
-        <p14:section name="마무리" id="{751c3b4d-2706-c740-568c-473db47906da}">
+        <p14:section name="마무리" id="{7c8627b0-760d-651a-0980-6f1c96bdb043}">
           <p14:sldIdLst>
             <p14:sldId id="293"/>
             <p14:sldId id="294"/>
@@ -45833,7 +45833,7 @@
                 <a:ea typeface="Noto Sans KR" pitchFamily="34" charset="-122"/>
                 <a:cs typeface="Noto Sans KR" pitchFamily="34" charset="-120"/>
               </a:rPr>
-              <a:t> (2015) — 탭하면 점프, 누르고 있으면 묘기. 조작은 사실상 하나. 리뷰에서 가장 많이 칭찬받은 것은 </a:t>
+              <a:t> (2015) — 탭하면 점프, 공중에서 누르고 있으면 묘기. 조작은 사실상 하나. 리뷰에서 가장 많이 칭찬받은 것은 </a:t>
             </a:r>
             <a:pPr algn="l" indent="0" marL="0">
               <a:lnSpc>
